--- a/media/resources/files/Onduktar_Sandardy_iReettoo_Sabak.pptx
+++ b/media/resources/files/Onduktar_Sandardy_iReettoo_Sabak.pptx
@@ -5017,7 +5017,7 @@
             </a:pPr>
             <a:r>
               <a:rPr lang="ru-RU" sz="3200" dirty="0"/>
-              <a:t>Бул ресурс математикалык ыкманын жандуу демонстрацияларын камсыз кылат.</a:t>
+              <a:t>Бул ресурс ыкманы жандуу көрсөтөт.</a:t>
             </a:r>
           </a:p>
           <a:p>
@@ -5335,7 +5335,7 @@
           <a:p>
             <a:r>
               <a:rPr lang="en-GB" sz="4000" kern="1700" spc="2000" dirty="0"/>
-              <a:t>2.680</a:t>
+              <a:t>2,680</a:t>
             </a:r>
           </a:p>
         </p:txBody>
@@ -5370,7 +5370,7 @@
           <a:p>
             <a:r>
               <a:rPr lang="en-GB" sz="4000" kern="1700" spc="2000" dirty="0"/>
-              <a:t>2.957</a:t>
+              <a:t>2,957</a:t>
             </a:r>
           </a:p>
         </p:txBody>
@@ -5405,7 +5405,7 @@
           <a:p>
             <a:r>
               <a:rPr lang="en-GB" sz="4000" kern="1700" spc="2000" dirty="0"/>
-              <a:t>2.620</a:t>
+              <a:t>2,620</a:t>
             </a:r>
           </a:p>
         </p:txBody>
@@ -5564,7 +5564,7 @@
                   <a:srgbClr val="FF0000"/>
                 </a:solidFill>
               </a:rPr>
-              <a:t>... көбөйүү , өсүү</a:t>
+              <a:t>... көбөйүү, өсүү</a:t>
             </a:r>
             <a:endParaRPr lang="en-GB" dirty="0">
               <a:solidFill>
@@ -5605,7 +5605,7 @@
             <a:pPr algn="ctr"/>
             <a:r>
               <a:rPr lang="en-GB" sz="3200" dirty="0"/>
-              <a:t>2.957</a:t>
+              <a:t>2,957</a:t>
             </a:r>
           </a:p>
         </p:txBody>
@@ -5641,7 +5641,7 @@
             <a:pPr algn="ctr"/>
             <a:r>
               <a:rPr lang="en-GB" sz="3200" dirty="0"/>
-              <a:t>2.62</a:t>
+              <a:t>2,62</a:t>
             </a:r>
           </a:p>
         </p:txBody>
@@ -5783,7 +5783,7 @@
             <a:pPr algn="ctr"/>
             <a:r>
               <a:rPr lang="en-GB" sz="3200" dirty="0"/>
-              <a:t>2.62,</a:t>
+              <a:t>2,62,</a:t>
             </a:r>
           </a:p>
         </p:txBody>
@@ -5819,7 +5819,7 @@
             <a:pPr algn="ctr"/>
             <a:r>
               <a:rPr lang="en-GB" sz="3200" dirty="0"/>
-              <a:t>2.68</a:t>
+              <a:t>2,68</a:t>
             </a:r>
           </a:p>
         </p:txBody>
@@ -6017,7 +6017,7 @@
             <a:pPr algn="ctr"/>
             <a:r>
               <a:rPr lang="en-GB" sz="3200" dirty="0"/>
-              <a:t>2.68,</a:t>
+              <a:t>2,68,</a:t>
             </a:r>
           </a:p>
         </p:txBody>
@@ -6053,7 +6053,7 @@
             <a:pPr algn="ctr"/>
             <a:r>
               <a:rPr lang="en-GB" sz="3200" dirty="0"/>
-              <a:t>2.957</a:t>
+              <a:t>2,957</a:t>
             </a:r>
           </a:p>
         </p:txBody>
@@ -7150,7 +7150,7 @@
           <a:p>
             <a:r>
               <a:rPr lang="en-GB" sz="4000" kern="1700" spc="2000" dirty="0"/>
-              <a:t>2.680</a:t>
+              <a:t>2,680</a:t>
             </a:r>
           </a:p>
         </p:txBody>
@@ -7185,7 +7185,7 @@
           <a:p>
             <a:r>
               <a:rPr lang="en-GB" sz="4000" kern="1700" spc="2000" dirty="0"/>
-              <a:t>2.957</a:t>
+              <a:t>2,957</a:t>
             </a:r>
           </a:p>
         </p:txBody>
@@ -7220,7 +7220,7 @@
           <a:p>
             <a:r>
               <a:rPr lang="en-GB" sz="4000" kern="1700" spc="2000" dirty="0"/>
-              <a:t>2.620</a:t>
+              <a:t>2,620</a:t>
             </a:r>
           </a:p>
         </p:txBody>
@@ -7419,7 +7419,7 @@
                   <a:srgbClr val="FF0000"/>
                 </a:solidFill>
               </a:rPr>
-              <a:t>... көбөйүү , өсүү</a:t>
+              <a:t>... көбөйүү, өсүү</a:t>
             </a:r>
             <a:endParaRPr lang="en-GB" dirty="0">
               <a:solidFill>
@@ -7460,7 +7460,7 @@
             <a:pPr algn="ctr"/>
             <a:r>
               <a:rPr lang="en-GB" sz="3200" dirty="0"/>
-              <a:t>2.957</a:t>
+              <a:t>2,957</a:t>
             </a:r>
           </a:p>
         </p:txBody>
@@ -7496,7 +7496,7 @@
             <a:pPr algn="ctr"/>
             <a:r>
               <a:rPr lang="en-GB" sz="3200" dirty="0"/>
-              <a:t>2.62</a:t>
+              <a:t>2,62</a:t>
             </a:r>
           </a:p>
         </p:txBody>
@@ -7638,7 +7638,7 @@
             <a:pPr algn="ctr"/>
             <a:r>
               <a:rPr lang="en-GB" sz="3200" dirty="0"/>
-              <a:t>2.62,</a:t>
+              <a:t>2,62,</a:t>
             </a:r>
           </a:p>
         </p:txBody>
@@ -7674,7 +7674,7 @@
             <a:pPr algn="ctr"/>
             <a:r>
               <a:rPr lang="en-GB" sz="3200" dirty="0"/>
-              <a:t>2.68</a:t>
+              <a:t>2,68</a:t>
             </a:r>
           </a:p>
         </p:txBody>
@@ -7872,7 +7872,7 @@
             <a:pPr algn="ctr"/>
             <a:r>
               <a:rPr lang="en-GB" sz="3200" dirty="0"/>
-              <a:t>2.68,</a:t>
+              <a:t>2,68,</a:t>
             </a:r>
           </a:p>
         </p:txBody>
@@ -7908,7 +7908,7 @@
             <a:pPr algn="ctr"/>
             <a:r>
               <a:rPr lang="en-GB" sz="3200" dirty="0"/>
-              <a:t>2.957</a:t>
+              <a:t>2,957</a:t>
             </a:r>
           </a:p>
         </p:txBody>
@@ -8169,7 +8169,7 @@
           <a:p>
             <a:r>
               <a:rPr lang="en-GB" sz="4000" kern="1700" spc="2000" dirty="0"/>
-              <a:t>1.67</a:t>
+              <a:t>1,67</a:t>
             </a:r>
           </a:p>
         </p:txBody>
@@ -8204,7 +8204,7 @@
           <a:p>
             <a:r>
               <a:rPr lang="en-GB" sz="4000" kern="1700" spc="2000" dirty="0"/>
-              <a:t>1.62</a:t>
+              <a:t>1,62</a:t>
             </a:r>
           </a:p>
         </p:txBody>
@@ -8239,7 +8239,7 @@
           <a:p>
             <a:r>
               <a:rPr lang="en-GB" sz="4000" kern="1700" spc="2000" dirty="0"/>
-              <a:t>1.52</a:t>
+              <a:t>1,52</a:t>
             </a:r>
           </a:p>
         </p:txBody>
@@ -8311,7 +8311,7 @@
             <a:pPr algn="ctr"/>
             <a:r>
               <a:rPr lang="en-GB" sz="3200" dirty="0"/>
-              <a:t>1.62</a:t>
+              <a:t>1,62</a:t>
             </a:r>
           </a:p>
         </p:txBody>
@@ -8347,7 +8347,7 @@
             <a:pPr algn="ctr"/>
             <a:r>
               <a:rPr lang="en-GB" sz="3200" dirty="0"/>
-              <a:t>1.52</a:t>
+              <a:t>1,52</a:t>
             </a:r>
           </a:p>
         </p:txBody>
@@ -8489,7 +8489,7 @@
             <a:pPr algn="ctr"/>
             <a:r>
               <a:rPr lang="en-GB" sz="3200" dirty="0"/>
-              <a:t>1.52,</a:t>
+              <a:t>1,52,</a:t>
             </a:r>
           </a:p>
         </p:txBody>
@@ -8525,7 +8525,7 @@
             <a:pPr algn="ctr"/>
             <a:r>
               <a:rPr lang="en-GB" sz="3200" dirty="0"/>
-              <a:t>1.67</a:t>
+              <a:t>1,67</a:t>
             </a:r>
           </a:p>
         </p:txBody>
@@ -8667,7 +8667,7 @@
             <a:pPr algn="ctr"/>
             <a:r>
               <a:rPr lang="en-GB" sz="3200" dirty="0"/>
-              <a:t>1.62,</a:t>
+              <a:t>1,62,</a:t>
             </a:r>
           </a:p>
         </p:txBody>
@@ -8703,7 +8703,7 @@
             <a:pPr algn="ctr"/>
             <a:r>
               <a:rPr lang="en-GB" sz="3200" dirty="0"/>
-              <a:t>1.67</a:t>
+              <a:t>1,67</a:t>
             </a:r>
           </a:p>
         </p:txBody>
@@ -9732,7 +9732,7 @@
                   <a:srgbClr val="FF0000"/>
                 </a:solidFill>
               </a:rPr>
-              <a:t>... көбөйүү , өсүү</a:t>
+              <a:t>... көбөйүү, өсүү</a:t>
             </a:r>
             <a:endParaRPr lang="en-GB" dirty="0">
               <a:solidFill>
@@ -9773,7 +9773,7 @@
             <a:pPr algn="ctr"/>
             <a:r>
               <a:rPr lang="en-GB" sz="3200" dirty="0"/>
-              <a:t>2.957</a:t>
+              <a:t>2,957</a:t>
             </a:r>
           </a:p>
         </p:txBody>
@@ -9809,7 +9809,7 @@
             <a:pPr algn="ctr"/>
             <a:r>
               <a:rPr lang="en-GB" sz="3200" dirty="0"/>
-              <a:t>2.62</a:t>
+              <a:t>2,62</a:t>
             </a:r>
           </a:p>
         </p:txBody>
@@ -9845,7 +9845,7 @@
             <a:pPr algn="ctr"/>
             <a:r>
               <a:rPr lang="en-GB" sz="3200" dirty="0"/>
-              <a:t>2.62,</a:t>
+              <a:t>2,62,</a:t>
             </a:r>
           </a:p>
         </p:txBody>
@@ -9881,7 +9881,7 @@
             <a:pPr algn="ctr"/>
             <a:r>
               <a:rPr lang="en-GB" sz="3200" dirty="0"/>
-              <a:t>2.68</a:t>
+              <a:t>2,68</a:t>
             </a:r>
           </a:p>
         </p:txBody>
@@ -9973,7 +9973,7 @@
             <a:pPr algn="ctr"/>
             <a:r>
               <a:rPr lang="en-GB" sz="3200" dirty="0"/>
-              <a:t>2.68,</a:t>
+              <a:t>2,68,</a:t>
             </a:r>
           </a:p>
         </p:txBody>
@@ -10009,7 +10009,7 @@
             <a:pPr algn="ctr"/>
             <a:r>
               <a:rPr lang="en-GB" sz="3200" dirty="0"/>
-              <a:t>2.957</a:t>
+              <a:t>2,957</a:t>
             </a:r>
           </a:p>
         </p:txBody>
@@ -10182,7 +10182,7 @@
           <a:p>
             <a:r>
               <a:rPr lang="en-GB" sz="4000" kern="1700" spc="2000" dirty="0"/>
-              <a:t>2.83</a:t>
+              <a:t>2,83</a:t>
             </a:r>
           </a:p>
         </p:txBody>
@@ -10217,7 +10217,7 @@
           <a:p>
             <a:r>
               <a:rPr lang="en-GB" sz="4000" kern="1700" spc="2000" dirty="0"/>
-              <a:t>3.59</a:t>
+              <a:t>3,59</a:t>
             </a:r>
           </a:p>
         </p:txBody>
@@ -10252,7 +10252,7 @@
           <a:p>
             <a:r>
               <a:rPr lang="en-GB" sz="4000" kern="1700" spc="2000" dirty="0"/>
-              <a:t>2.87</a:t>
+              <a:t>2,87</a:t>
             </a:r>
           </a:p>
         </p:txBody>
@@ -10324,7 +10324,7 @@
             <a:pPr algn="ctr"/>
             <a:r>
               <a:rPr lang="en-GB" sz="3200" dirty="0"/>
-              <a:t>3.59</a:t>
+              <a:t>3,59</a:t>
             </a:r>
           </a:p>
         </p:txBody>
@@ -10360,7 +10360,7 @@
             <a:pPr algn="ctr"/>
             <a:r>
               <a:rPr lang="en-GB" sz="3200" dirty="0"/>
-              <a:t>2.87</a:t>
+              <a:t>2,87</a:t>
             </a:r>
           </a:p>
         </p:txBody>
@@ -10510,7 +10510,7 @@
             <a:pPr algn="ctr"/>
             <a:r>
               <a:rPr lang="en-GB" sz="3200" dirty="0"/>
-              <a:t>2.83,</a:t>
+              <a:t>2,83,</a:t>
             </a:r>
           </a:p>
         </p:txBody>
@@ -10546,7 +10546,7 @@
             <a:pPr algn="ctr"/>
             <a:r>
               <a:rPr lang="en-GB" sz="3200" dirty="0"/>
-              <a:t>2.83</a:t>
+              <a:t>2,83</a:t>
             </a:r>
           </a:p>
         </p:txBody>
@@ -10688,7 +10688,7 @@
             <a:pPr algn="ctr"/>
             <a:r>
               <a:rPr lang="en-GB" sz="3200" dirty="0"/>
-              <a:t>2.87,</a:t>
+              <a:t>2,87,</a:t>
             </a:r>
           </a:p>
         </p:txBody>
@@ -10724,7 +10724,7 @@
             <a:pPr algn="ctr"/>
             <a:r>
               <a:rPr lang="en-GB" sz="3200" dirty="0"/>
-              <a:t>3.59</a:t>
+              <a:t>3,59</a:t>
             </a:r>
           </a:p>
         </p:txBody>
@@ -10985,7 +10985,7 @@
           <a:p>
             <a:r>
               <a:rPr lang="en-GB" sz="4000" kern="1700" spc="2000" dirty="0"/>
-              <a:t>2.680</a:t>
+              <a:t>2,680</a:t>
             </a:r>
           </a:p>
         </p:txBody>
@@ -11020,7 +11020,7 @@
           <a:p>
             <a:r>
               <a:rPr lang="en-GB" sz="4000" kern="1700" spc="2000" dirty="0"/>
-              <a:t>2.957</a:t>
+              <a:t>2,957</a:t>
             </a:r>
           </a:p>
         </p:txBody>
@@ -11055,7 +11055,7 @@
           <a:p>
             <a:r>
               <a:rPr lang="en-GB" sz="4000" kern="1700" spc="2000" dirty="0"/>
-              <a:t>2.620</a:t>
+              <a:t>2,620</a:t>
             </a:r>
           </a:p>
         </p:txBody>
@@ -12336,7 +12336,7 @@
                   <a:srgbClr val="FF0000"/>
                 </a:solidFill>
               </a:rPr>
-              <a:t>... көбөйүү , өсүү</a:t>
+              <a:t>... көбөйүү, өсүү</a:t>
             </a:r>
             <a:endParaRPr lang="en-GB" dirty="0">
               <a:solidFill>
@@ -12377,7 +12377,7 @@
             <a:pPr algn="ctr"/>
             <a:r>
               <a:rPr lang="en-GB" sz="3200" dirty="0"/>
-              <a:t>2.957</a:t>
+              <a:t>2,957</a:t>
             </a:r>
           </a:p>
         </p:txBody>
@@ -12413,7 +12413,7 @@
             <a:pPr algn="ctr"/>
             <a:r>
               <a:rPr lang="en-GB" sz="3200" dirty="0"/>
-              <a:t>2.62</a:t>
+              <a:t>2,62</a:t>
             </a:r>
           </a:p>
         </p:txBody>
@@ -12449,7 +12449,7 @@
             <a:pPr algn="ctr"/>
             <a:r>
               <a:rPr lang="en-GB" sz="3200" dirty="0"/>
-              <a:t>2.62,</a:t>
+              <a:t>2,62,</a:t>
             </a:r>
           </a:p>
         </p:txBody>
@@ -12485,7 +12485,7 @@
             <a:pPr algn="ctr"/>
             <a:r>
               <a:rPr lang="en-GB" sz="3200" dirty="0"/>
-              <a:t>2.68</a:t>
+              <a:t>2,68</a:t>
             </a:r>
           </a:p>
         </p:txBody>
@@ -12577,7 +12577,7 @@
             <a:pPr algn="ctr"/>
             <a:r>
               <a:rPr lang="en-GB" sz="3200" dirty="0"/>
-              <a:t>2.68,</a:t>
+              <a:t>2,68,</a:t>
             </a:r>
           </a:p>
         </p:txBody>
@@ -12613,7 +12613,7 @@
             <a:pPr algn="ctr"/>
             <a:r>
               <a:rPr lang="en-GB" sz="3200" dirty="0"/>
-              <a:t>2.957</a:t>
+              <a:t>2,957</a:t>
             </a:r>
           </a:p>
         </p:txBody>
@@ -12786,7 +12786,7 @@
           <a:p>
             <a:r>
               <a:rPr lang="en-GB" sz="4000" kern="1700" spc="2000" dirty="0"/>
-              <a:t>2.51</a:t>
+              <a:t>2,51</a:t>
             </a:r>
           </a:p>
         </p:txBody>
@@ -12821,7 +12821,7 @@
           <a:p>
             <a:r>
               <a:rPr lang="en-GB" sz="4000" kern="1700" spc="2000" dirty="0"/>
-              <a:t>2.08</a:t>
+              <a:t>2,08</a:t>
             </a:r>
           </a:p>
         </p:txBody>
@@ -12856,7 +12856,7 @@
           <a:p>
             <a:r>
               <a:rPr lang="en-GB" sz="4000" kern="1700" spc="2000" dirty="0"/>
-              <a:t>2.30</a:t>
+              <a:t>2,30</a:t>
             </a:r>
           </a:p>
         </p:txBody>
@@ -12928,7 +12928,7 @@
             <a:pPr algn="ctr"/>
             <a:r>
               <a:rPr lang="en-GB" sz="3200" dirty="0"/>
-              <a:t>2.08</a:t>
+              <a:t>2,08</a:t>
             </a:r>
           </a:p>
         </p:txBody>
@@ -12964,7 +12964,7 @@
             <a:pPr algn="ctr"/>
             <a:r>
               <a:rPr lang="en-GB" sz="3200" dirty="0"/>
-              <a:t>2.30</a:t>
+              <a:t>2,30</a:t>
             </a:r>
           </a:p>
         </p:txBody>
@@ -13114,7 +13114,7 @@
             <a:pPr algn="ctr"/>
             <a:r>
               <a:rPr lang="en-GB" sz="3200" dirty="0"/>
-              <a:t>2.08,</a:t>
+              <a:t>2,08,</a:t>
             </a:r>
           </a:p>
         </p:txBody>
@@ -13150,7 +13150,7 @@
             <a:pPr algn="ctr"/>
             <a:r>
               <a:rPr lang="en-GB" sz="3200" dirty="0"/>
-              <a:t>2.51</a:t>
+              <a:t>2,51</a:t>
             </a:r>
           </a:p>
         </p:txBody>
@@ -13292,7 +13292,7 @@
             <a:pPr algn="ctr"/>
             <a:r>
               <a:rPr lang="en-GB" sz="3200" dirty="0"/>
-              <a:t>2.30,</a:t>
+              <a:t>2,30,</a:t>
             </a:r>
           </a:p>
         </p:txBody>
@@ -13328,7 +13328,7 @@
             <a:pPr algn="ctr"/>
             <a:r>
               <a:rPr lang="en-GB" sz="3200" dirty="0"/>
-              <a:t>2.51</a:t>
+              <a:t>2,51</a:t>
             </a:r>
           </a:p>
         </p:txBody>
@@ -13589,7 +13589,7 @@
           <a:p>
             <a:r>
               <a:rPr lang="en-GB" sz="4000" kern="1700" spc="2000" dirty="0"/>
-              <a:t>2.680</a:t>
+              <a:t>2,680</a:t>
             </a:r>
           </a:p>
         </p:txBody>
@@ -13624,7 +13624,7 @@
           <a:p>
             <a:r>
               <a:rPr lang="en-GB" sz="4000" kern="1700" spc="2000" dirty="0"/>
-              <a:t>2.957</a:t>
+              <a:t>2,957</a:t>
             </a:r>
           </a:p>
         </p:txBody>
@@ -13659,7 +13659,7 @@
           <a:p>
             <a:r>
               <a:rPr lang="en-GB" sz="4000" kern="1700" spc="2000" dirty="0"/>
-              <a:t>2.620</a:t>
+              <a:t>2,620</a:t>
             </a:r>
           </a:p>
         </p:txBody>
@@ -14940,7 +14940,7 @@
                   <a:srgbClr val="FF0000"/>
                 </a:solidFill>
               </a:rPr>
-              <a:t>... көбөйүү , өсүү</a:t>
+              <a:t>... көбөйүү, өсүү</a:t>
             </a:r>
             <a:endParaRPr lang="en-GB" dirty="0">
               <a:solidFill>
@@ -14981,7 +14981,7 @@
             <a:pPr algn="ctr"/>
             <a:r>
               <a:rPr lang="en-GB" sz="3200" dirty="0"/>
-              <a:t>2.957</a:t>
+              <a:t>2,957</a:t>
             </a:r>
           </a:p>
         </p:txBody>
@@ -15017,7 +15017,7 @@
             <a:pPr algn="ctr"/>
             <a:r>
               <a:rPr lang="en-GB" sz="3200" dirty="0"/>
-              <a:t>2.62</a:t>
+              <a:t>2,62</a:t>
             </a:r>
           </a:p>
         </p:txBody>
@@ -15053,7 +15053,7 @@
             <a:pPr algn="ctr"/>
             <a:r>
               <a:rPr lang="en-GB" sz="3200" dirty="0"/>
-              <a:t>2.62,</a:t>
+              <a:t>2,62,</a:t>
             </a:r>
           </a:p>
         </p:txBody>
@@ -15089,7 +15089,7 @@
             <a:pPr algn="ctr"/>
             <a:r>
               <a:rPr lang="en-GB" sz="3200" dirty="0"/>
-              <a:t>2.68</a:t>
+              <a:t>2,68</a:t>
             </a:r>
           </a:p>
         </p:txBody>
@@ -15181,7 +15181,7 @@
             <a:pPr algn="ctr"/>
             <a:r>
               <a:rPr lang="en-GB" sz="3200" dirty="0"/>
-              <a:t>2.68,</a:t>
+              <a:t>2,68,</a:t>
             </a:r>
           </a:p>
         </p:txBody>
@@ -15217,7 +15217,7 @@
             <a:pPr algn="ctr"/>
             <a:r>
               <a:rPr lang="en-GB" sz="3200" dirty="0"/>
-              <a:t>2.957</a:t>
+              <a:t>2,957</a:t>
             </a:r>
           </a:p>
         </p:txBody>
@@ -15390,7 +15390,7 @@
           <a:p>
             <a:r>
               <a:rPr lang="en-GB" sz="4000" kern="1700" spc="2000" dirty="0"/>
-              <a:t>4.507</a:t>
+              <a:t>4,507</a:t>
             </a:r>
           </a:p>
         </p:txBody>
@@ -15425,7 +15425,7 @@
           <a:p>
             <a:r>
               <a:rPr lang="en-GB" sz="4000" kern="1700" spc="2000" dirty="0"/>
-              <a:t>4.490</a:t>
+              <a:t>4,490</a:t>
             </a:r>
           </a:p>
         </p:txBody>
@@ -15460,7 +15460,7 @@
           <a:p>
             <a:r>
               <a:rPr lang="en-GB" sz="4000" kern="1700" spc="2000" dirty="0"/>
-              <a:t>4.510</a:t>
+              <a:t>4,510</a:t>
             </a:r>
           </a:p>
         </p:txBody>
@@ -15533,7 +15533,7 @@
             <a:pPr algn="ctr"/>
             <a:r>
               <a:rPr lang="en-GB" sz="3200" dirty="0"/>
-              <a:t>4.49</a:t>
+              <a:t>4,49</a:t>
             </a:r>
           </a:p>
         </p:txBody>
@@ -15569,7 +15569,7 @@
             <a:pPr algn="ctr"/>
             <a:r>
               <a:rPr lang="en-GB" sz="3200" dirty="0"/>
-              <a:t>4.51</a:t>
+              <a:t>4,51</a:t>
             </a:r>
           </a:p>
         </p:txBody>
@@ -15711,7 +15711,7 @@
             <a:pPr algn="ctr"/>
             <a:r>
               <a:rPr lang="en-GB" sz="3200" dirty="0"/>
-              <a:t>4.49,</a:t>
+              <a:t>4,49,</a:t>
             </a:r>
           </a:p>
         </p:txBody>
@@ -15747,7 +15747,7 @@
             <a:pPr algn="ctr"/>
             <a:r>
               <a:rPr lang="en-GB" sz="3200" dirty="0"/>
-              <a:t>4.507</a:t>
+              <a:t>4,507</a:t>
             </a:r>
           </a:p>
         </p:txBody>
@@ -15889,7 +15889,7 @@
             <a:pPr algn="ctr"/>
             <a:r>
               <a:rPr lang="en-GB" sz="3200" dirty="0"/>
-              <a:t>4.507,</a:t>
+              <a:t>4,507,</a:t>
             </a:r>
           </a:p>
         </p:txBody>
@@ -15925,7 +15925,7 @@
             <a:pPr algn="ctr"/>
             <a:r>
               <a:rPr lang="en-GB" sz="3200" dirty="0"/>
-              <a:t>4.51</a:t>
+              <a:t>4,51</a:t>
             </a:r>
           </a:p>
         </p:txBody>
@@ -16186,7 +16186,7 @@
           <a:p>
             <a:r>
               <a:rPr lang="en-GB" sz="4000" kern="1700" spc="2000" dirty="0"/>
-              <a:t>2.680</a:t>
+              <a:t>2,680</a:t>
             </a:r>
           </a:p>
         </p:txBody>
@@ -16221,7 +16221,7 @@
           <a:p>
             <a:r>
               <a:rPr lang="en-GB" sz="4000" kern="1700" spc="2000" dirty="0"/>
-              <a:t>2.957</a:t>
+              <a:t>2,957</a:t>
             </a:r>
           </a:p>
         </p:txBody>
@@ -16256,7 +16256,7 @@
           <a:p>
             <a:r>
               <a:rPr lang="en-GB" sz="4000" kern="1700" spc="2000" dirty="0"/>
-              <a:t>2.620</a:t>
+              <a:t>2,620</a:t>
             </a:r>
           </a:p>
         </p:txBody>
@@ -17537,7 +17537,7 @@
                   <a:srgbClr val="FF0000"/>
                 </a:solidFill>
               </a:rPr>
-              <a:t>... көбөйүү , өсүү</a:t>
+              <a:t>... көбөйүү, өсүү</a:t>
             </a:r>
             <a:endParaRPr lang="en-GB" dirty="0">
               <a:solidFill>
@@ -17578,7 +17578,7 @@
             <a:pPr algn="ctr"/>
             <a:r>
               <a:rPr lang="en-GB" sz="3200" dirty="0"/>
-              <a:t>2.957</a:t>
+              <a:t>2,957</a:t>
             </a:r>
           </a:p>
         </p:txBody>
@@ -17614,7 +17614,7 @@
             <a:pPr algn="ctr"/>
             <a:r>
               <a:rPr lang="en-GB" sz="3200" dirty="0"/>
-              <a:t>2.62</a:t>
+              <a:t>2,62</a:t>
             </a:r>
           </a:p>
         </p:txBody>
@@ -17650,7 +17650,7 @@
             <a:pPr algn="ctr"/>
             <a:r>
               <a:rPr lang="en-GB" sz="3200" dirty="0"/>
-              <a:t>2.62,</a:t>
+              <a:t>2,62,</a:t>
             </a:r>
           </a:p>
         </p:txBody>
@@ -17686,7 +17686,7 @@
             <a:pPr algn="ctr"/>
             <a:r>
               <a:rPr lang="en-GB" sz="3200" dirty="0"/>
-              <a:t>2.68</a:t>
+              <a:t>2,68</a:t>
             </a:r>
           </a:p>
         </p:txBody>
@@ -17778,7 +17778,7 @@
             <a:pPr algn="ctr"/>
             <a:r>
               <a:rPr lang="en-GB" sz="3200" dirty="0"/>
-              <a:t>2.68,</a:t>
+              <a:t>2,68,</a:t>
             </a:r>
           </a:p>
         </p:txBody>
@@ -17814,7 +17814,7 @@
             <a:pPr algn="ctr"/>
             <a:r>
               <a:rPr lang="en-GB" sz="3200" dirty="0"/>
-              <a:t>2.957</a:t>
+              <a:t>2,957</a:t>
             </a:r>
           </a:p>
         </p:txBody>
@@ -17987,7 +17987,7 @@
           <a:p>
             <a:r>
               <a:rPr lang="en-GB" sz="4000" kern="1700" spc="2000" dirty="0"/>
-              <a:t>3.200</a:t>
+              <a:t>3,200</a:t>
             </a:r>
           </a:p>
         </p:txBody>
@@ -18022,7 +18022,7 @@
           <a:p>
             <a:r>
               <a:rPr lang="en-GB" sz="4000" kern="1700" spc="2000" dirty="0"/>
-              <a:t>3.025</a:t>
+              <a:t>3,025</a:t>
             </a:r>
           </a:p>
         </p:txBody>
@@ -18057,7 +18057,7 @@
           <a:p>
             <a:r>
               <a:rPr lang="en-GB" sz="4000" kern="1700" spc="2000" dirty="0"/>
-              <a:t>3.216</a:t>
+              <a:t>3,216</a:t>
             </a:r>
           </a:p>
         </p:txBody>
@@ -18130,7 +18130,7 @@
             <a:pPr algn="ctr"/>
             <a:r>
               <a:rPr lang="en-GB" sz="3200" dirty="0"/>
-              <a:t>3.025</a:t>
+              <a:t>3,025</a:t>
             </a:r>
           </a:p>
         </p:txBody>
@@ -18166,7 +18166,7 @@
             <a:pPr algn="ctr"/>
             <a:r>
               <a:rPr lang="en-GB" sz="3200" dirty="0"/>
-              <a:t>3.216</a:t>
+              <a:t>3,216</a:t>
             </a:r>
           </a:p>
         </p:txBody>
@@ -18308,7 +18308,7 @@
             <a:pPr algn="ctr"/>
             <a:r>
               <a:rPr lang="en-GB" sz="3200" dirty="0"/>
-              <a:t>3.025,</a:t>
+              <a:t>3,025,</a:t>
             </a:r>
           </a:p>
         </p:txBody>
@@ -18344,7 +18344,7 @@
             <a:pPr algn="ctr"/>
             <a:r>
               <a:rPr lang="en-GB" sz="3200" dirty="0"/>
-              <a:t>3.2</a:t>
+              <a:t>3,2</a:t>
             </a:r>
           </a:p>
         </p:txBody>
@@ -18486,7 +18486,7 @@
             <a:pPr algn="ctr"/>
             <a:r>
               <a:rPr lang="en-GB" sz="3200" dirty="0"/>
-              <a:t>3.2,</a:t>
+              <a:t>3,2,</a:t>
             </a:r>
           </a:p>
         </p:txBody>
@@ -18522,7 +18522,7 @@
             <a:pPr algn="ctr"/>
             <a:r>
               <a:rPr lang="en-GB" sz="3200" dirty="0"/>
-              <a:t>3.216</a:t>
+              <a:t>3,216</a:t>
             </a:r>
           </a:p>
         </p:txBody>
@@ -18783,7 +18783,7 @@
           <a:p>
             <a:r>
               <a:rPr lang="en-GB" sz="4000" kern="1700" spc="2000" dirty="0"/>
-              <a:t>2.680</a:t>
+              <a:t>2,680</a:t>
             </a:r>
           </a:p>
         </p:txBody>
@@ -18818,7 +18818,7 @@
           <a:p>
             <a:r>
               <a:rPr lang="en-GB" sz="4000" kern="1700" spc="2000" dirty="0"/>
-              <a:t>2.957</a:t>
+              <a:t>2,957</a:t>
             </a:r>
           </a:p>
         </p:txBody>
@@ -18853,7 +18853,7 @@
           <a:p>
             <a:r>
               <a:rPr lang="en-GB" sz="4000" kern="1700" spc="2000" dirty="0"/>
-              <a:t>2.620</a:t>
+              <a:t>2,620</a:t>
             </a:r>
           </a:p>
         </p:txBody>
@@ -20272,7 +20272,7 @@
                   <a:srgbClr val="FF0000"/>
                 </a:solidFill>
               </a:rPr>
-              <a:t>... көбөйүү , өсүү</a:t>
+              <a:t>... көбөйүү, өсүү</a:t>
             </a:r>
             <a:endParaRPr lang="en-GB" dirty="0">
               <a:solidFill>
@@ -20313,7 +20313,7 @@
             <a:pPr algn="ctr"/>
             <a:r>
               <a:rPr lang="en-GB" sz="3200" dirty="0"/>
-              <a:t>2.957</a:t>
+              <a:t>2,957</a:t>
             </a:r>
           </a:p>
         </p:txBody>
@@ -20349,7 +20349,7 @@
             <a:pPr algn="ctr"/>
             <a:r>
               <a:rPr lang="en-GB" sz="3200" dirty="0"/>
-              <a:t>2.62</a:t>
+              <a:t>2,62</a:t>
             </a:r>
           </a:p>
         </p:txBody>
@@ -20385,7 +20385,7 @@
             <a:pPr algn="ctr"/>
             <a:r>
               <a:rPr lang="en-GB" sz="3200" dirty="0"/>
-              <a:t>2.62,</a:t>
+              <a:t>2,62,</a:t>
             </a:r>
           </a:p>
         </p:txBody>
@@ -20421,7 +20421,7 @@
             <a:pPr algn="ctr"/>
             <a:r>
               <a:rPr lang="en-GB" sz="3200" dirty="0"/>
-              <a:t>2.68</a:t>
+              <a:t>2,68</a:t>
             </a:r>
           </a:p>
         </p:txBody>
@@ -20513,7 +20513,7 @@
             <a:pPr algn="ctr"/>
             <a:r>
               <a:rPr lang="en-GB" sz="3200" dirty="0"/>
-              <a:t>2.68,</a:t>
+              <a:t>2,68,</a:t>
             </a:r>
           </a:p>
         </p:txBody>
@@ -20549,7 +20549,7 @@
             <a:pPr algn="ctr"/>
             <a:r>
               <a:rPr lang="en-GB" sz="3200" dirty="0"/>
-              <a:t>2.957</a:t>
+              <a:t>2,957</a:t>
             </a:r>
           </a:p>
         </p:txBody>
@@ -20584,7 +20584,7 @@
           <a:p>
             <a:r>
               <a:rPr lang="en-GB" sz="4000" kern="1700" spc="2000" dirty="0"/>
-              <a:t>5.450</a:t>
+              <a:t>5,450</a:t>
             </a:r>
           </a:p>
         </p:txBody>
@@ -20619,7 +20619,7 @@
           <a:p>
             <a:r>
               <a:rPr lang="en-GB" sz="4000" kern="1700" spc="2000" dirty="0"/>
-              <a:t>5.380</a:t>
+              <a:t>5,380</a:t>
             </a:r>
           </a:p>
         </p:txBody>
@@ -20654,7 +20654,7 @@
           <a:p>
             <a:r>
               <a:rPr lang="en-GB" sz="4000" kern="1700" spc="2000" dirty="0"/>
-              <a:t>5.359</a:t>
+              <a:t>5,359</a:t>
             </a:r>
           </a:p>
         </p:txBody>
@@ -20727,7 +20727,7 @@
             <a:pPr algn="ctr"/>
             <a:r>
               <a:rPr lang="en-GB" sz="3200" dirty="0"/>
-              <a:t>5.38</a:t>
+              <a:t>5,38</a:t>
             </a:r>
           </a:p>
         </p:txBody>
@@ -20763,7 +20763,7 @@
             <a:pPr algn="ctr"/>
             <a:r>
               <a:rPr lang="en-GB" sz="3200" dirty="0"/>
-              <a:t>5.359</a:t>
+              <a:t>5,359</a:t>
             </a:r>
           </a:p>
         </p:txBody>
@@ -20844,7 +20844,7 @@
             <a:pPr algn="ctr"/>
             <a:r>
               <a:rPr lang="en-GB" sz="3200" dirty="0"/>
-              <a:t>5.359,</a:t>
+              <a:t>5,359,</a:t>
             </a:r>
           </a:p>
         </p:txBody>
@@ -20880,7 +20880,7 @@
             <a:pPr algn="ctr"/>
             <a:r>
               <a:rPr lang="en-GB" sz="3200" dirty="0"/>
-              <a:t>5.45</a:t>
+              <a:t>5,45</a:t>
             </a:r>
           </a:p>
         </p:txBody>
@@ -20961,7 +20961,7 @@
             <a:pPr algn="ctr"/>
             <a:r>
               <a:rPr lang="en-GB" sz="3200" dirty="0"/>
-              <a:t>5.38,</a:t>
+              <a:t>5,38,</a:t>
             </a:r>
           </a:p>
         </p:txBody>
@@ -20997,7 +20997,7 @@
             <a:pPr algn="ctr"/>
             <a:r>
               <a:rPr lang="en-GB" sz="3200" dirty="0"/>
-              <a:t>5.405,</a:t>
+              <a:t>5,405,</a:t>
             </a:r>
           </a:p>
         </p:txBody>
@@ -21121,7 +21121,7 @@
             <a:pPr algn="ctr"/>
             <a:r>
               <a:rPr lang="en-GB" sz="3200" dirty="0"/>
-              <a:t>5.405</a:t>
+              <a:t>5,405</a:t>
             </a:r>
           </a:p>
         </p:txBody>
@@ -21156,7 +21156,7 @@
           <a:p>
             <a:r>
               <a:rPr lang="en-GB" sz="4000" kern="1700" spc="2000" dirty="0"/>
-              <a:t>5.405</a:t>
+              <a:t>5,405</a:t>
             </a:r>
           </a:p>
         </p:txBody>
@@ -21464,7 +21464,7 @@
             <a:pPr algn="ctr"/>
             <a:r>
               <a:rPr lang="en-GB" sz="3200" dirty="0"/>
-              <a:t>5.45</a:t>
+              <a:t>5,45</a:t>
             </a:r>
           </a:p>
         </p:txBody>
@@ -21637,7 +21637,7 @@
           <a:p>
             <a:r>
               <a:rPr lang="en-GB" sz="4000" kern="1700" spc="2000" dirty="0"/>
-              <a:t>2.680</a:t>
+              <a:t>2,680</a:t>
             </a:r>
           </a:p>
         </p:txBody>
@@ -21672,7 +21672,7 @@
           <a:p>
             <a:r>
               <a:rPr lang="en-GB" sz="4000" kern="1700" spc="2000" dirty="0"/>
-              <a:t>2.957</a:t>
+              <a:t>2,957</a:t>
             </a:r>
           </a:p>
         </p:txBody>
@@ -21707,7 +21707,7 @@
           <a:p>
             <a:r>
               <a:rPr lang="en-GB" sz="4000" kern="1700" spc="2000" dirty="0"/>
-              <a:t>2.620</a:t>
+              <a:t>2,620</a:t>
             </a:r>
           </a:p>
         </p:txBody>
@@ -23359,7 +23359,7 @@
                   <a:srgbClr val="FF0000"/>
                 </a:solidFill>
               </a:rPr>
-              <a:t>... көбөйүү , өсүү</a:t>
+              <a:t>... көбөйүү, өсүү</a:t>
             </a:r>
             <a:endParaRPr lang="en-GB" dirty="0">
               <a:solidFill>
@@ -23400,7 +23400,7 @@
             <a:pPr algn="ctr"/>
             <a:r>
               <a:rPr lang="en-GB" sz="3200" dirty="0"/>
-              <a:t>2.957</a:t>
+              <a:t>2,957</a:t>
             </a:r>
           </a:p>
         </p:txBody>
@@ -23436,7 +23436,7 @@
             <a:pPr algn="ctr"/>
             <a:r>
               <a:rPr lang="en-GB" sz="3200" dirty="0"/>
-              <a:t>2.62</a:t>
+              <a:t>2,62</a:t>
             </a:r>
           </a:p>
         </p:txBody>
@@ -23472,7 +23472,7 @@
             <a:pPr algn="ctr"/>
             <a:r>
               <a:rPr lang="en-GB" sz="3200" dirty="0"/>
-              <a:t>2.62,</a:t>
+              <a:t>2,62,</a:t>
             </a:r>
           </a:p>
         </p:txBody>
@@ -23508,7 +23508,7 @@
             <a:pPr algn="ctr"/>
             <a:r>
               <a:rPr lang="en-GB" sz="3200" dirty="0"/>
-              <a:t>2.68</a:t>
+              <a:t>2,68</a:t>
             </a:r>
           </a:p>
         </p:txBody>
@@ -23600,7 +23600,7 @@
             <a:pPr algn="ctr"/>
             <a:r>
               <a:rPr lang="en-GB" sz="3200" dirty="0"/>
-              <a:t>2.68,</a:t>
+              <a:t>2,68,</a:t>
             </a:r>
           </a:p>
         </p:txBody>
@@ -23636,7 +23636,7 @@
             <a:pPr algn="ctr"/>
             <a:r>
               <a:rPr lang="en-GB" sz="3200" dirty="0"/>
-              <a:t>2.957</a:t>
+              <a:t>2,957</a:t>
             </a:r>
           </a:p>
         </p:txBody>
@@ -23671,7 +23671,7 @@
           <a:p>
             <a:r>
               <a:rPr lang="en-GB" sz="4000" kern="1700" spc="2000" dirty="0"/>
-              <a:t>3.330</a:t>
+              <a:t>3,330</a:t>
             </a:r>
           </a:p>
         </p:txBody>
@@ -23706,7 +23706,7 @@
           <a:p>
             <a:r>
               <a:rPr lang="en-GB" sz="4000" kern="1700" spc="2000" dirty="0"/>
-              <a:t>3.316</a:t>
+              <a:t>3,316</a:t>
             </a:r>
           </a:p>
         </p:txBody>
@@ -23741,7 +23741,7 @@
           <a:p>
             <a:r>
               <a:rPr lang="en-GB" sz="4000" kern="1700" spc="2000" dirty="0"/>
-              <a:t>3.310</a:t>
+              <a:t>3,310</a:t>
             </a:r>
           </a:p>
         </p:txBody>
@@ -23814,7 +23814,7 @@
             <a:pPr algn="ctr"/>
             <a:r>
               <a:rPr lang="en-GB" sz="3200" dirty="0"/>
-              <a:t>3.316</a:t>
+              <a:t>3,316</a:t>
             </a:r>
           </a:p>
         </p:txBody>
@@ -23850,7 +23850,7 @@
             <a:pPr algn="ctr"/>
             <a:r>
               <a:rPr lang="en-GB" sz="3200" dirty="0"/>
-              <a:t>3.31</a:t>
+              <a:t>3,31</a:t>
             </a:r>
           </a:p>
         </p:txBody>
@@ -23931,7 +23931,7 @@
             <a:pPr algn="ctr"/>
             <a:r>
               <a:rPr lang="en-GB" sz="3200" dirty="0"/>
-              <a:t>3.27,</a:t>
+              <a:t>3,27,</a:t>
             </a:r>
           </a:p>
         </p:txBody>
@@ -23967,7 +23967,7 @@
             <a:pPr algn="ctr"/>
             <a:r>
               <a:rPr lang="en-GB" sz="3200" dirty="0"/>
-              <a:t>3.33</a:t>
+              <a:t>3,33</a:t>
             </a:r>
           </a:p>
         </p:txBody>
@@ -24048,7 +24048,7 @@
             <a:pPr algn="ctr"/>
             <a:r>
               <a:rPr lang="en-GB" sz="3200" dirty="0"/>
-              <a:t>3.31,</a:t>
+              <a:t>3,31,</a:t>
             </a:r>
           </a:p>
         </p:txBody>
@@ -24084,7 +24084,7 @@
             <a:pPr algn="ctr"/>
             <a:r>
               <a:rPr lang="en-GB" sz="3200" dirty="0"/>
-              <a:t>3.316,</a:t>
+              <a:t>3,316,</a:t>
             </a:r>
           </a:p>
         </p:txBody>
@@ -24164,7 +24164,7 @@
             <a:pPr algn="ctr"/>
             <a:r>
               <a:rPr lang="en-GB" sz="3200" dirty="0"/>
-              <a:t>3.27</a:t>
+              <a:t>3,27</a:t>
             </a:r>
           </a:p>
         </p:txBody>
@@ -24199,7 +24199,7 @@
           <a:p>
             <a:r>
               <a:rPr lang="en-GB" sz="4000" kern="1700" spc="2000" dirty="0"/>
-              <a:t>3.270</a:t>
+              <a:t>3,270</a:t>
             </a:r>
           </a:p>
         </p:txBody>
@@ -24507,7 +24507,7 @@
             <a:pPr algn="ctr"/>
             <a:r>
               <a:rPr lang="en-GB" sz="3200" dirty="0"/>
-              <a:t>3.33</a:t>
+              <a:t>3,33</a:t>
             </a:r>
           </a:p>
         </p:txBody>
@@ -24724,7 +24724,7 @@
           <a:p>
             <a:r>
               <a:rPr lang="en-GB" sz="4000" kern="1700" spc="2000" dirty="0"/>
-              <a:t>2.680</a:t>
+              <a:t>2,680</a:t>
             </a:r>
           </a:p>
         </p:txBody>
@@ -24759,7 +24759,7 @@
           <a:p>
             <a:r>
               <a:rPr lang="en-GB" sz="4000" kern="1700" spc="2000" dirty="0"/>
-              <a:t>2.957</a:t>
+              <a:t>2,957</a:t>
             </a:r>
           </a:p>
         </p:txBody>
@@ -24794,7 +24794,7 @@
           <a:p>
             <a:r>
               <a:rPr lang="en-GB" sz="4000" kern="1700" spc="2000" dirty="0"/>
-              <a:t>2.620</a:t>
+              <a:t>2,620</a:t>
             </a:r>
           </a:p>
         </p:txBody>
@@ -26381,7 +26381,7 @@
             <a:pPr algn="ctr"/>
             <a:r>
               <a:rPr lang="en-GB" sz="3200" dirty="0"/>
-              <a:t>2.957</a:t>
+              <a:t>2,957</a:t>
             </a:r>
           </a:p>
         </p:txBody>
@@ -26417,7 +26417,7 @@
             <a:pPr algn="ctr"/>
             <a:r>
               <a:rPr lang="en-GB" sz="3200" dirty="0"/>
-              <a:t>2.62</a:t>
+              <a:t>2,62</a:t>
             </a:r>
           </a:p>
         </p:txBody>
@@ -26453,7 +26453,7 @@
             <a:pPr algn="ctr"/>
             <a:r>
               <a:rPr lang="en-GB" sz="3200" dirty="0"/>
-              <a:t>2.62,</a:t>
+              <a:t>2,62,</a:t>
             </a:r>
           </a:p>
         </p:txBody>
@@ -26489,7 +26489,7 @@
             <a:pPr algn="ctr"/>
             <a:r>
               <a:rPr lang="en-GB" sz="3200" dirty="0"/>
-              <a:t>2.68</a:t>
+              <a:t>2,68</a:t>
             </a:r>
           </a:p>
         </p:txBody>
@@ -26581,7 +26581,7 @@
             <a:pPr algn="ctr"/>
             <a:r>
               <a:rPr lang="en-GB" sz="3200" dirty="0"/>
-              <a:t>2.68,</a:t>
+              <a:t>2,68,</a:t>
             </a:r>
           </a:p>
         </p:txBody>
@@ -26617,7 +26617,7 @@
             <a:pPr algn="ctr"/>
             <a:r>
               <a:rPr lang="en-GB" sz="3200" dirty="0"/>
-              <a:t>2.957</a:t>
+              <a:t>2,957</a:t>
             </a:r>
           </a:p>
         </p:txBody>
@@ -26790,7 +26790,7 @@
           <a:p>
             <a:r>
               <a:rPr lang="en-GB" sz="4000" kern="1700" spc="2000" dirty="0"/>
-              <a:t>2.680</a:t>
+              <a:t>2,680</a:t>
             </a:r>
           </a:p>
         </p:txBody>
@@ -26825,7 +26825,7 @@
           <a:p>
             <a:r>
               <a:rPr lang="en-GB" sz="4000" kern="1700" spc="2000" dirty="0"/>
-              <a:t>2.957</a:t>
+              <a:t>2,957</a:t>
             </a:r>
           </a:p>
         </p:txBody>
@@ -26860,7 +26860,7 @@
           <a:p>
             <a:r>
               <a:rPr lang="en-GB" sz="4000" kern="1700" spc="2000" dirty="0"/>
-              <a:t>2.620</a:t>
+              <a:t>2,620</a:t>
             </a:r>
           </a:p>
         </p:txBody>
@@ -27236,13 +27236,13 @@
             </a:r>
             <a:r>
               <a:rPr lang="en-GB" sz="2800" dirty="0"/>
-              <a:t>)   4.62, 4.51, 4.64</a:t>
+              <a:t>)   4,62, 4,51, 4,64</a:t>
             </a:r>
           </a:p>
           <a:p>
             <a:r>
               <a:rPr lang="en-GB" sz="2800" dirty="0"/>
-              <a:t>		4.51, 4.62, 4.64 </a:t>
+              <a:t>		4,51, 4,62, 4,64 </a:t>
             </a:r>
           </a:p>
         </p:txBody>
@@ -27281,13 +27281,13 @@
             </a:r>
             <a:r>
               <a:rPr lang="en-GB" sz="2800" dirty="0"/>
-              <a:t>)   6.3, 6.29, 6.28</a:t>
+              <a:t>)   6,3, 6,29, 6,28</a:t>
             </a:r>
           </a:p>
           <a:p>
             <a:r>
               <a:rPr lang="en-GB" sz="2800" dirty="0"/>
-              <a:t>		6.28, 6.29, 6.3 </a:t>
+              <a:t>		6,28, 6,29, 6,3 </a:t>
             </a:r>
           </a:p>
         </p:txBody>
@@ -27326,13 +27326,13 @@
             </a:r>
             <a:r>
               <a:rPr lang="en-GB" sz="2800" dirty="0"/>
-              <a:t>)   4.701, 4.07, 4.78, 4.7</a:t>
+              <a:t>)   4,701, 4,07, 4,78, 4,7</a:t>
             </a:r>
           </a:p>
           <a:p>
             <a:r>
               <a:rPr lang="en-GB" sz="2800" dirty="0"/>
-              <a:t>		4.07, 4.7, 4.701, 4.78 </a:t>
+              <a:t>		4,07, 4,7, 4,701, 4,78 </a:t>
             </a:r>
           </a:p>
         </p:txBody>
@@ -27371,13 +27371,13 @@
             </a:r>
             <a:r>
               <a:rPr lang="en-GB" sz="2800" dirty="0"/>
-              <a:t>)   1.56, 1.605, 1.65, 1.556</a:t>
+              <a:t>)   1,56, 1,605, 1,65, 1,556</a:t>
             </a:r>
           </a:p>
           <a:p>
             <a:r>
               <a:rPr lang="en-GB" sz="2800" dirty="0"/>
-              <a:t>		1.556, 1.56, 1.605, 1.65 </a:t>
+              <a:t>		1,556, 1,56, 1,605, 1,65 </a:t>
             </a:r>
           </a:p>
         </p:txBody>
@@ -27416,13 +27416,13 @@
             </a:r>
             <a:r>
               <a:rPr lang="en-GB" sz="2800" dirty="0"/>
-              <a:t>)   1.305, 1.503, 1.035, 1.35</a:t>
+              <a:t>)   1,305, 1,503, 1,035, 1,35</a:t>
             </a:r>
           </a:p>
           <a:p>
             <a:r>
               <a:rPr lang="en-GB" sz="2800" dirty="0"/>
-              <a:t>		1.035, 1.305, 1.35, 1.503 </a:t>
+              <a:t>		1,035, 1,305, 1,35, 1,503 </a:t>
             </a:r>
           </a:p>
         </p:txBody>
@@ -28432,7 +28432,7 @@
           <a:p>
             <a:r>
               <a:rPr lang="en-GB" sz="7200" dirty="0"/>
-              <a:t>3.500</a:t>
+              <a:t>3,500</a:t>
             </a:r>
           </a:p>
         </p:txBody>
@@ -28467,7 +28467,7 @@
           <a:p>
             <a:r>
               <a:rPr lang="en-GB" sz="7200" dirty="0"/>
-              <a:t>3.4918799</a:t>
+              <a:t>3,4918799</a:t>
             </a:r>
           </a:p>
         </p:txBody>
@@ -28539,7 +28539,7 @@
           <a:p>
             <a:r>
               <a:rPr lang="en-GB" sz="7200" dirty="0"/>
-              <a:t>3.500</a:t>
+              <a:t>3,500</a:t>
             </a:r>
           </a:p>
         </p:txBody>
@@ -28574,7 +28574,7 @@
           <a:p>
             <a:r>
               <a:rPr lang="en-GB" sz="7200" dirty="0"/>
-              <a:t>3.4918799</a:t>
+              <a:t>3,4918799</a:t>
             </a:r>
           </a:p>
         </p:txBody>
@@ -28798,7 +28798,7 @@
             <a:pPr algn="ctr"/>
             <a:r>
               <a:rPr lang="en-GB" sz="7200" dirty="0"/>
-              <a:t>273.418</a:t>
+              <a:t>273,418</a:t>
             </a:r>
           </a:p>
         </p:txBody>
@@ -31761,7 +31761,7 @@
                   <a:srgbClr val="FF0000"/>
                 </a:solidFill>
               </a:rPr>
-              <a:t>көбурөөк мааниге ээ</a:t>
+              <a:t>көбүрөөк мааниге ээ</a:t>
             </a:r>
             <a:r>
               <a:rPr lang="ky-KG" sz="2000" dirty="0"/>
@@ -31869,7 +31869,7 @@
                   <a:srgbClr val="FF0000"/>
                 </a:solidFill>
               </a:rPr>
-              <a:t>Көбурөөк мааниге ээ</a:t>
+              <a:t>Көбүрөөк мааниге ээ</a:t>
             </a:r>
             <a:endParaRPr lang="en-GB" sz="2000" dirty="0">
               <a:solidFill>
@@ -33414,7 +33414,7 @@
             <a:pPr algn="ctr"/>
             <a:r>
               <a:rPr lang="en-GB" sz="7200" dirty="0"/>
-              <a:t>273.418</a:t>
+              <a:t>273,418</a:t>
             </a:r>
           </a:p>
         </p:txBody>
@@ -37160,7 +37160,7 @@
             <a:pPr algn="ctr"/>
             <a:r>
               <a:rPr lang="en-GB" sz="7200" dirty="0"/>
-              <a:t>272.999</a:t>
+              <a:t>272,999</a:t>
             </a:r>
           </a:p>
         </p:txBody>
@@ -42013,7 +42013,7 @@
             <a:pPr algn="ctr"/>
             <a:r>
               <a:rPr lang="en-GB" sz="7200" dirty="0"/>
-              <a:t>0.999</a:t>
+              <a:t>0,999</a:t>
             </a:r>
           </a:p>
         </p:txBody>
@@ -42890,7 +42890,7 @@
               <a:pPr algn="ctr"/>
               <a:r>
                 <a:rPr lang="en-GB" sz="7200" dirty="0"/>
-                <a:t>0.999</a:t>
+                <a:t>0,999</a:t>
               </a:r>
             </a:p>
           </p:txBody>
@@ -43069,7 +43069,7 @@
                 <a:pPr algn="ctr"/>
                 <a:r>
                   <a:rPr lang="en-GB" sz="7200" dirty="0"/>
-                  <a:t>9.99999</a:t>
+                  <a:t>9,99999</a:t>
                 </a:r>
               </a:p>
             </p:txBody>
@@ -43107,7 +43107,7 @@
             <a:pPr algn="ctr"/>
             <a:r>
               <a:rPr lang="ky-KG" sz="2000" dirty="0"/>
-              <a:t>Ар бир жупта эмне үчүн жогоруда жайгашкан сан ,</a:t>
+              <a:t>Ар бир жупта эмне үчүн жогоруда жайгашкан сан,</a:t>
             </a:r>
           </a:p>
           <a:p>
@@ -43623,7 +43623,7 @@
           <a:p>
             <a:r>
               <a:rPr lang="en-GB" sz="4000" kern="1700" spc="2000" dirty="0"/>
-              <a:t>2.71</a:t>
+              <a:t>2,71</a:t>
             </a:r>
           </a:p>
         </p:txBody>
@@ -43658,7 +43658,7 @@
           <a:p>
             <a:r>
               <a:rPr lang="en-GB" sz="4000" kern="1700" spc="2000" dirty="0"/>
-              <a:t>2.83</a:t>
+              <a:t>2,83</a:t>
             </a:r>
           </a:p>
         </p:txBody>
@@ -43693,7 +43693,7 @@
           <a:p>
             <a:r>
               <a:rPr lang="en-GB" sz="4000" kern="1700" spc="2000" dirty="0"/>
-              <a:t>1.97</a:t>
+              <a:t>1,97</a:t>
             </a:r>
           </a:p>
         </p:txBody>
@@ -43893,7 +43893,7 @@
                   <a:srgbClr val="FF0000"/>
                 </a:solidFill>
               </a:rPr>
-              <a:t>... көбөйүү , өсүү</a:t>
+              <a:t>... көбөйүү, өсүү</a:t>
             </a:r>
             <a:endParaRPr lang="en-GB" dirty="0">
               <a:solidFill>
@@ -43934,7 +43934,7 @@
             <a:pPr algn="ctr"/>
             <a:r>
               <a:rPr lang="en-GB" sz="3200" dirty="0"/>
-              <a:t>2.83</a:t>
+              <a:t>2,83</a:t>
             </a:r>
           </a:p>
         </p:txBody>
@@ -43970,7 +43970,7 @@
             <a:pPr algn="ctr"/>
             <a:r>
               <a:rPr lang="en-GB" sz="3200" dirty="0"/>
-              <a:t>1.97</a:t>
+              <a:t>1,97</a:t>
             </a:r>
           </a:p>
         </p:txBody>
@@ -44112,7 +44112,7 @@
             <a:pPr algn="ctr"/>
             <a:r>
               <a:rPr lang="en-GB" sz="3200" dirty="0"/>
-              <a:t>1.97,</a:t>
+              <a:t>1,97,</a:t>
             </a:r>
           </a:p>
         </p:txBody>
@@ -44148,7 +44148,7 @@
             <a:pPr algn="ctr"/>
             <a:r>
               <a:rPr lang="en-GB" sz="3200" dirty="0"/>
-              <a:t>2.71</a:t>
+              <a:t>2,71</a:t>
             </a:r>
           </a:p>
         </p:txBody>
@@ -44346,7 +44346,7 @@
             <a:pPr algn="ctr"/>
             <a:r>
               <a:rPr lang="en-GB" sz="3200" dirty="0"/>
-              <a:t>2.71,</a:t>
+              <a:t>2,71,</a:t>
             </a:r>
           </a:p>
         </p:txBody>
@@ -44382,7 +44382,7 @@
             <a:pPr algn="ctr"/>
             <a:r>
               <a:rPr lang="en-GB" sz="3200" dirty="0"/>
-              <a:t>2.83</a:t>
+              <a:t>2,83</a:t>
             </a:r>
           </a:p>
         </p:txBody>
@@ -45474,7 +45474,7 @@
           <a:p>
             <a:r>
               <a:rPr lang="en-GB" sz="4000" kern="1700" spc="2000" dirty="0"/>
-              <a:t>3.41</a:t>
+              <a:t>3,41</a:t>
             </a:r>
           </a:p>
         </p:txBody>
@@ -45509,7 +45509,7 @@
           <a:p>
             <a:r>
               <a:rPr lang="en-GB" sz="4000" kern="1700" spc="2000" dirty="0"/>
-              <a:t>3.39</a:t>
+              <a:t>3,39</a:t>
             </a:r>
           </a:p>
         </p:txBody>
@@ -45544,7 +45544,7 @@
           <a:p>
             <a:r>
               <a:rPr lang="en-GB" sz="4000" kern="1700" spc="2000" dirty="0"/>
-              <a:t>3.57</a:t>
+              <a:t>3,57</a:t>
             </a:r>
           </a:p>
         </p:txBody>
@@ -45703,7 +45703,7 @@
                   <a:srgbClr val="FF0000"/>
                 </a:solidFill>
               </a:rPr>
-              <a:t>... көбөйүү , өсүү</a:t>
+              <a:t>... көбөйүү, өсүү</a:t>
             </a:r>
             <a:endParaRPr lang="en-GB" dirty="0">
               <a:solidFill>
@@ -45744,7 +45744,7 @@
             <a:pPr algn="ctr"/>
             <a:r>
               <a:rPr lang="en-GB" sz="3200" dirty="0"/>
-              <a:t>3.39</a:t>
+              <a:t>3,39</a:t>
             </a:r>
           </a:p>
         </p:txBody>
@@ -45780,7 +45780,7 @@
             <a:pPr algn="ctr"/>
             <a:r>
               <a:rPr lang="en-GB" sz="3200" dirty="0"/>
-              <a:t>3.57</a:t>
+              <a:t>3,57</a:t>
             </a:r>
           </a:p>
         </p:txBody>
@@ -45922,7 +45922,7 @@
             <a:pPr algn="ctr"/>
             <a:r>
               <a:rPr lang="en-GB" sz="3200" dirty="0"/>
-              <a:t>3.39,</a:t>
+              <a:t>3,39,</a:t>
             </a:r>
           </a:p>
         </p:txBody>
@@ -45958,7 +45958,7 @@
             <a:pPr algn="ctr"/>
             <a:r>
               <a:rPr lang="en-GB" sz="3200" dirty="0"/>
-              <a:t>3.41</a:t>
+              <a:t>3,41</a:t>
             </a:r>
           </a:p>
         </p:txBody>
@@ -46156,7 +46156,7 @@
             <a:pPr algn="ctr"/>
             <a:r>
               <a:rPr lang="en-GB" sz="3200" dirty="0"/>
-              <a:t>3.41,</a:t>
+              <a:t>3,41,</a:t>
             </a:r>
           </a:p>
         </p:txBody>
@@ -46192,7 +46192,7 @@
             <a:pPr algn="ctr"/>
             <a:r>
               <a:rPr lang="en-GB" sz="3200" dirty="0"/>
-              <a:t>3.57</a:t>
+              <a:t>3,57</a:t>
             </a:r>
           </a:p>
         </p:txBody>
@@ -47325,7 +47325,7 @@
           <a:p>
             <a:r>
               <a:rPr lang="en-GB" sz="4000" kern="1700" spc="2000" dirty="0"/>
-              <a:t>2.67</a:t>
+              <a:t>2,67</a:t>
             </a:r>
           </a:p>
         </p:txBody>
@@ -47360,7 +47360,7 @@
           <a:p>
             <a:r>
               <a:rPr lang="en-GB" sz="4000" kern="1700" spc="2000" dirty="0"/>
-              <a:t>2.65</a:t>
+              <a:t>2,65</a:t>
             </a:r>
           </a:p>
         </p:txBody>
@@ -47395,7 +47395,7 @@
           <a:p>
             <a:r>
               <a:rPr lang="en-GB" sz="4000" kern="1700" spc="2000" dirty="0"/>
-              <a:t>2.70</a:t>
+              <a:t>2,70</a:t>
             </a:r>
           </a:p>
         </p:txBody>
@@ -47554,7 +47554,7 @@
                   <a:srgbClr val="FF0000"/>
                 </a:solidFill>
               </a:rPr>
-              <a:t>... көбөйүү , өсүү</a:t>
+              <a:t>... көбөйүү, өсүү</a:t>
             </a:r>
             <a:endParaRPr lang="en-GB" dirty="0">
               <a:solidFill>
@@ -47595,7 +47595,7 @@
             <a:pPr algn="ctr"/>
             <a:r>
               <a:rPr lang="en-GB" sz="3200" dirty="0"/>
-              <a:t>2.65</a:t>
+              <a:t>2,65</a:t>
             </a:r>
           </a:p>
         </p:txBody>
@@ -47631,7 +47631,7 @@
             <a:pPr algn="ctr"/>
             <a:r>
               <a:rPr lang="en-GB" sz="3200" dirty="0"/>
-              <a:t>2.70</a:t>
+              <a:t>2,70</a:t>
             </a:r>
           </a:p>
         </p:txBody>
@@ -47773,7 +47773,7 @@
             <a:pPr algn="ctr"/>
             <a:r>
               <a:rPr lang="en-GB" sz="3200" dirty="0"/>
-              <a:t>2.65,</a:t>
+              <a:t>2,65,</a:t>
             </a:r>
           </a:p>
         </p:txBody>
@@ -47809,7 +47809,7 @@
             <a:pPr algn="ctr"/>
             <a:r>
               <a:rPr lang="en-GB" sz="3200" dirty="0"/>
-              <a:t>2.67</a:t>
+              <a:t>2,67</a:t>
             </a:r>
           </a:p>
         </p:txBody>
@@ -48007,7 +48007,7 @@
             <a:pPr algn="ctr"/>
             <a:r>
               <a:rPr lang="en-GB" sz="3200" dirty="0"/>
-              <a:t>2.67,</a:t>
+              <a:t>2,67,</a:t>
             </a:r>
           </a:p>
         </p:txBody>
@@ -48043,7 +48043,7 @@
             <a:pPr algn="ctr"/>
             <a:r>
               <a:rPr lang="en-GB" sz="3200" dirty="0"/>
-              <a:t>2.70</a:t>
+              <a:t>2,70</a:t>
             </a:r>
           </a:p>
         </p:txBody>

--- a/media/resources/files/Onduktar_Sandardy_iReettoo_Sabak.pptx
+++ b/media/resources/files/Onduktar_Sandardy_iReettoo_Sabak.pptx
@@ -28467,7 +28467,7 @@
           <a:p>
             <a:r>
               <a:rPr lang="en-GB" sz="7200" dirty="0"/>
-              <a:t>3,4918799</a:t>
+              <a:t>3,4 918 799</a:t>
             </a:r>
           </a:p>
         </p:txBody>
@@ -28574,7 +28574,7 @@
           <a:p>
             <a:r>
               <a:rPr lang="en-GB" sz="7200" dirty="0"/>
-              <a:t>3,4918799</a:t>
+              <a:t>3,4 918 799</a:t>
             </a:r>
           </a:p>
         </p:txBody>
@@ -43069,7 +43069,7 @@
                 <a:pPr algn="ctr"/>
                 <a:r>
                   <a:rPr lang="en-GB" sz="7200" dirty="0"/>
-                  <a:t>9,99999</a:t>
+                  <a:t>9,99 999</a:t>
                 </a:r>
               </a:p>
             </p:txBody>
